--- a/docs/Recherche-existence-chemin.pptx
+++ b/docs/Recherche-existence-chemin.pptx
@@ -24,6 +24,7 @@
     <p:sldId id="272" r:id="rId23"/>
     <p:sldId id="273" r:id="rId24"/>
     <p:sldId id="274" r:id="rId25"/>
+    <p:sldId id="275" r:id="rId26"/>
   </p:sldIdLst>
   <p:sldSz cx="12191695" cy="6858000" type="screen4x3"/>
   <p:notesSz cx="6858000" cy="9144000"/>
@@ -6384,7 +6385,7 @@
                             <a:srgbClr val="222A35"/>
                           </a:solidFill>
                         </a:rPr>
-                        <a:t>charger EDGE au démarrage (adjacence + inverse)</a:t>
+                        <a:t>charger le graphe au démarrage (CSR) — BFS sans SQL</a:t>
                       </a:r>
                     </a:p>
                   </a:txBody>
@@ -6426,7 +6427,7 @@
                             <a:srgbClr val="222A35"/>
                           </a:solidFill>
                         </a:rPr>
-                        <a:t>recommandé</a:t>
+                        <a:t>IMPLÉMENTÉ (dotnet-new-scan/)</a:t>
                       </a:r>
                     </a:p>
                   </a:txBody>
@@ -8741,27 +8742,120 @@
           <a:lstStyle/>
           <a:p>
             <a:r>
+              <a:rPr sz="1200" b="1">
+                <a:solidFill>
+                  <a:srgbClr val="16A34A"/>
+                </a:solidFill>
+              </a:rPr>
+              <a:t>ZOOM (§ 11.7, DOTNET-NEW-SCAN/)</a:t>
+            </a:r>
+          </a:p>
+          <a:p>
+            <a:r>
               <a:rPr sz="2800" b="1">
                 <a:solidFill>
                   <a:srgbClr val="1F3A5F"/>
                 </a:solidFill>
               </a:rPr>
-              <a:t>Synthèse</a:t>
+              <a:t>2 millions de nœuds : le graphe en mémoire</a:t>
+            </a:r>
+          </a:p>
+        </p:txBody>
+      </p:sp>
+      <p:sp>
+        <p:nvSpPr>
+          <p:cNvPr id="4" name="TextBox 3"/>
+          <p:cNvSpPr txBox="1"/>
+          <p:nvPr/>
+        </p:nvSpPr>
+        <p:spPr>
+          <a:xfrm>
+            <a:off x="640080" y="1645920"/>
+            <a:ext cx="5943600" cy="4846320"/>
+          </a:xfrm>
+          <a:prstGeom prst="rect">
+            <a:avLst/>
+          </a:prstGeom>
+          <a:noFill/>
+        </p:spPr>
+        <p:txBody>
+          <a:bodyPr wrap="square">
+            <a:spAutoFit/>
+          </a:bodyPr>
+          <a:lstStyle/>
+          <a:p>
+            <a:pPr>
+              <a:spcAft>
+                <a:spcPts val="700"/>
+              </a:spcAft>
+            </a:pPr>
+            <a:r>
+              <a:rPr sz="1300">
+                <a:solidFill>
+                  <a:srgbClr val="222A35"/>
+                </a:solidFill>
+              </a:rPr>
+              <a:t>•  Le coût du BFS n'est pas le calcul, ce sont les allers-retours SQL (une salve de requêtes par palier).</a:t>
+            </a:r>
+          </a:p>
+          <a:p>
+            <a:pPr>
+              <a:spcAft>
+                <a:spcPts val="700"/>
+              </a:spcAft>
+            </a:pPr>
+            <a:r>
+              <a:rPr sz="1300">
+                <a:solidFill>
+                  <a:srgbClr val="222A35"/>
+                </a:solidFill>
+              </a:rPr>
+              <a:t>•  Solution : charger tout le graphe orienté en RAM au démarrage, en tableaux CSR indexés par entier.</a:t>
+            </a:r>
+          </a:p>
+          <a:p>
+            <a:pPr>
+              <a:spcAft>
+                <a:spcPts val="700"/>
+              </a:spcAft>
+            </a:pPr>
+            <a:r>
+              <a:rPr sz="1300">
+                <a:solidFill>
+                  <a:srgbClr val="222A35"/>
+                </a:solidFill>
+              </a:rPr>
+              <a:t>•  Le BFS bidirectionnel tourne alors 100 % en mémoire — aucune requête.</a:t>
+            </a:r>
+          </a:p>
+          <a:p>
+            <a:pPr>
+              <a:spcAft>
+                <a:spcPts val="700"/>
+              </a:spcAft>
+            </a:pPr>
+            <a:r>
+              <a:rPr sz="1300">
+                <a:solidFill>
+                  <a:srgbClr val="222A35"/>
+                </a:solidFill>
+              </a:rPr>
+              <a:t>•  Chargement en tâche de fond ; repli sur le BFS SQL tant qu'il n'est pas prêt ; rechargeable via /Scan.</a:t>
             </a:r>
           </a:p>
         </p:txBody>
       </p:sp>
       <p:graphicFrame>
         <p:nvGraphicFramePr>
-          <p:cNvPr id="4" name="Table 3"/>
+          <p:cNvPr id="5" name="Table 4"/>
           <p:cNvGraphicFramePr>
             <a:graphicFrameLocks noGrp="1"/>
           </p:cNvGraphicFramePr>
           <p:nvPr/>
         </p:nvGraphicFramePr>
         <p:xfrm>
-          <a:off x="640080" y="1737360"/>
-          <a:ext cx="10911534" cy="2304288"/>
+          <a:off x="6766560" y="1828800"/>
+          <a:ext cx="4937760" cy="1920240"/>
         </p:xfrm>
         <a:graphic>
           <a:graphicData uri="http://schemas.openxmlformats.org/drawingml/2006/table">
@@ -8770,22 +8864,35 @@
                 <a:tableStyleId>{5C22544A-7EE6-4342-B048-85BDC9FD1C3A}</a:tableStyleId>
               </a:tblPr>
               <a:tblGrid>
-                <a:gridCol w="3091601"/>
-                <a:gridCol w="7819933"/>
+                <a:gridCol w="1645920"/>
+                <a:gridCol w="1645920"/>
+                <a:gridCol w="1645920"/>
               </a:tblGrid>
               <a:tr h="384048">
                 <a:tc>
                   <a:txBody>
                     <a:bodyPr/>
                     <a:lstStyle/>
-                    <a:p>
-                      <a:r>
-                        <a:rPr sz="1200" b="1">
+                    <a:p/>
+                  </a:txBody>
+                  <a:tcPr marL="88900" marR="88900" marT="38100" marB="38100" anchor="ctr">
+                    <a:solidFill>
+                      <a:srgbClr val="1F3A5F"/>
+                    </a:solidFill>
+                  </a:tcPr>
+                </a:tc>
+                <a:tc>
+                  <a:txBody>
+                    <a:bodyPr/>
+                    <a:lstStyle/>
+                    <a:p>
+                      <a:r>
+                        <a:rPr sz="1000" b="1">
                           <a:solidFill>
                             <a:srgbClr val="FFFFFF"/>
                           </a:solidFill>
                         </a:rPr>
-                        <a:t>Aspect</a:t>
+                        <a:t>BFS SQL</a:t>
                       </a:r>
                     </a:p>
                   </a:txBody>
@@ -8801,12 +8908,12 @@
                     <a:lstStyle/>
                     <a:p>
                       <a:r>
-                        <a:rPr sz="1200" b="1">
+                        <a:rPr sz="1000" b="1">
                           <a:solidFill>
                             <a:srgbClr val="FFFFFF"/>
                           </a:solidFill>
                         </a:rPr>
-                        <a:t>En bref</a:t>
+                        <a:t>BFS en mémoire</a:t>
                       </a:r>
                     </a:p>
                   </a:txBody>
@@ -8824,12 +8931,12 @@
                     <a:lstStyle/>
                     <a:p>
                       <a:r>
-                        <a:rPr sz="1200">
-                          <a:solidFill>
-                            <a:srgbClr val="222A35"/>
-                          </a:solidFill>
-                        </a:rPr>
-                        <a:t>Le graphe</a:t>
+                        <a:rPr sz="1000">
+                          <a:solidFill>
+                            <a:srgbClr val="222A35"/>
+                          </a:solidFill>
+                        </a:rPr>
+                        <a:t>par palier</a:t>
                       </a:r>
                     </a:p>
                   </a:txBody>
@@ -8845,12 +8952,33 @@
                     <a:lstStyle/>
                     <a:p>
                       <a:r>
-                        <a:rPr sz="1200">
-                          <a:solidFill>
-                            <a:srgbClr val="222A35"/>
-                          </a:solidFill>
-                        </a:rPr>
-                        <a:t>orienté, non pondéré, creux, cyclique possible, non connexe, ~100 000 nœuds</a:t>
+                        <a:rPr sz="1000">
+                          <a:solidFill>
+                            <a:srgbClr val="222A35"/>
+                          </a:solidFill>
+                        </a:rPr>
+                        <a:t>~120 requêtes</a:t>
+                      </a:r>
+                    </a:p>
+                  </a:txBody>
+                  <a:tcPr marL="88900" marR="88900" marT="38100" marB="38100" anchor="ctr">
+                    <a:solidFill>
+                      <a:srgbClr val="FFFFFF"/>
+                    </a:solidFill>
+                  </a:tcPr>
+                </a:tc>
+                <a:tc>
+                  <a:txBody>
+                    <a:bodyPr/>
+                    <a:lstStyle/>
+                    <a:p>
+                      <a:r>
+                        <a:rPr sz="1000">
+                          <a:solidFill>
+                            <a:srgbClr val="222A35"/>
+                          </a:solidFill>
+                        </a:rPr>
+                        <a:t>parcours de tableaux</a:t>
                       </a:r>
                     </a:p>
                   </a:txBody>
@@ -8868,12 +8996,12 @@
                     <a:lstStyle/>
                     <a:p>
                       <a:r>
-                        <a:rPr sz="1200">
-                          <a:solidFill>
-                            <a:srgbClr val="222A35"/>
-                          </a:solidFill>
-                        </a:rPr>
-                        <a:t>Le besoin</a:t>
+                        <a:rPr sz="1000">
+                          <a:solidFill>
+                            <a:srgbClr val="222A35"/>
+                          </a:solidFill>
+                        </a:rPr>
+                        <a:t>latence / recherche</a:t>
                       </a:r>
                     </a:p>
                   </a:txBody>
@@ -8889,12 +9017,33 @@
                     <a:lstStyle/>
                     <a:p>
                       <a:r>
-                        <a:rPr sz="1200">
-                          <a:solidFill>
-                            <a:srgbClr val="222A35"/>
-                          </a:solidFill>
-                        </a:rPr>
-                        <a:t>existence + plus court chemin — résolus ensemble par un seul BFS</a:t>
+                        <a:rPr sz="1000">
+                          <a:solidFill>
+                            <a:srgbClr val="222A35"/>
+                          </a:solidFill>
+                        </a:rPr>
+                        <a:t>dizaines–centaines ms</a:t>
+                      </a:r>
+                    </a:p>
+                  </a:txBody>
+                  <a:tcPr marL="88900" marR="88900" marT="38100" marB="38100" anchor="ctr">
+                    <a:solidFill>
+                      <a:srgbClr val="F1F3F6"/>
+                    </a:solidFill>
+                  </a:tcPr>
+                </a:tc>
+                <a:tc>
+                  <a:txBody>
+                    <a:bodyPr/>
+                    <a:lstStyle/>
+                    <a:p>
+                      <a:r>
+                        <a:rPr sz="1000">
+                          <a:solidFill>
+                            <a:srgbClr val="222A35"/>
+                          </a:solidFill>
+                        </a:rPr>
+                        <a:t>~8–10 ms (mesuré)</a:t>
                       </a:r>
                     </a:p>
                   </a:txBody>
@@ -8912,12 +9061,12 @@
                     <a:lstStyle/>
                     <a:p>
                       <a:r>
-                        <a:rPr sz="1200">
-                          <a:solidFill>
-                            <a:srgbClr val="222A35"/>
-                          </a:solidFill>
-                        </a:rPr>
-                        <a:t>L'algorithme</a:t>
+                        <a:rPr sz="1000">
+                          <a:solidFill>
+                            <a:srgbClr val="222A35"/>
+                          </a:solidFill>
+                        </a:rPr>
+                        <a:t>sensible à la taille</a:t>
                       </a:r>
                     </a:p>
                   </a:txBody>
@@ -8933,12 +9082,33 @@
                     <a:lstStyle/>
                     <a:p>
                       <a:r>
-                        <a:rPr sz="1200">
-                          <a:solidFill>
-                            <a:srgbClr val="222A35"/>
-                          </a:solidFill>
-                        </a:rPr>
-                        <a:t>BFS bidirectionnel par paliers, exécuté en SQL, borné, résultat en cache 5 min</a:t>
+                        <a:rPr sz="1000">
+                          <a:solidFill>
+                            <a:srgbClr val="222A35"/>
+                          </a:solidFill>
+                        </a:rPr>
+                        <a:t>oui</a:t>
+                      </a:r>
+                    </a:p>
+                  </a:txBody>
+                  <a:tcPr marL="88900" marR="88900" marT="38100" marB="38100" anchor="ctr">
+                    <a:solidFill>
+                      <a:srgbClr val="FFFFFF"/>
+                    </a:solidFill>
+                  </a:tcPr>
+                </a:tc>
+                <a:tc>
+                  <a:txBody>
+                    <a:bodyPr/>
+                    <a:lstStyle/>
+                    <a:p>
+                      <a:r>
+                        <a:rPr sz="1000">
+                          <a:solidFill>
+                            <a:srgbClr val="222A35"/>
+                          </a:solidFill>
+                        </a:rPr>
+                        <a:t>non</a:t>
                       </a:r>
                     </a:p>
                   </a:txBody>
@@ -8956,12 +9126,12 @@
                     <a:lstStyle/>
                     <a:p>
                       <a:r>
-                        <a:rPr sz="1200">
-                          <a:solidFill>
-                            <a:srgbClr val="222A35"/>
-                          </a:solidFill>
-                        </a:rPr>
-                        <a:t>Pas Dijkstra / A* / Floyd-Warshall</a:t>
+                        <a:rPr sz="1000">
+                          <a:solidFill>
+                            <a:srgbClr val="222A35"/>
+                          </a:solidFill>
+                        </a:rPr>
+                        <a:t>RAM (100 k / 2 M nœuds)</a:t>
                       </a:r>
                     </a:p>
                   </a:txBody>
@@ -8977,12 +9147,12 @@
                     <a:lstStyle/>
                     <a:p>
                       <a:r>
-                        <a:rPr sz="1200">
-                          <a:solidFill>
-                            <a:srgbClr val="222A35"/>
-                          </a:solidFill>
-                        </a:rPr>
-                        <a:t>problème plus dur (poids, toutes paires), coût supérieur, sans bénéfice ici</a:t>
+                        <a:rPr sz="1000">
+                          <a:solidFill>
+                            <a:srgbClr val="222A35"/>
+                          </a:solidFill>
+                        </a:rPr>
+                        <a:t>—</a:t>
                       </a:r>
                     </a:p>
                   </a:txBody>
@@ -8992,47 +9162,24 @@
                     </a:solidFill>
                   </a:tcPr>
                 </a:tc>
-              </a:tr>
-              <a:tr h="384048">
-                <a:tc>
-                  <a:txBody>
-                    <a:bodyPr/>
-                    <a:lstStyle/>
-                    <a:p>
-                      <a:r>
-                        <a:rPr sz="1200">
-                          <a:solidFill>
-                            <a:srgbClr val="222A35"/>
-                          </a:solidFill>
-                        </a:rPr>
-                        <a:t>Pré-calculs (dotnet-new-scan/)</a:t>
-                      </a:r>
-                    </a:p>
-                  </a:txBody>
-                  <a:tcPr marL="88900" marR="88900" marT="38100" marB="38100" anchor="ctr">
-                    <a:solidFill>
-                      <a:srgbClr val="FFFFFF"/>
-                    </a:solidFill>
-                  </a:tcPr>
-                </a:tc>
-                <a:tc>
-                  <a:txBody>
-                    <a:bodyPr/>
-                    <a:lstStyle/>
-                    <a:p>
-                      <a:r>
-                        <a:rPr sz="1200">
-                          <a:solidFill>
-                            <a:srgbClr val="222A35"/>
-                          </a:solidFill>
-                        </a:rPr>
-                        <a:t>§ 11.4 composantes faibles (NON certain) · § 11.5 condensation SCC (OUI/NON exact sans BFS)</a:t>
-                      </a:r>
-                    </a:p>
-                  </a:txBody>
-                  <a:tcPr marL="88900" marR="88900" marT="38100" marB="38100" anchor="ctr">
-                    <a:solidFill>
-                      <a:srgbClr val="FFFFFF"/>
+                <a:tc>
+                  <a:txBody>
+                    <a:bodyPr/>
+                    <a:lstStyle/>
+                    <a:p>
+                      <a:r>
+                        <a:rPr sz="1000">
+                          <a:solidFill>
+                            <a:srgbClr val="222A35"/>
+                          </a:solidFill>
+                        </a:rPr>
+                        <a:t>~12 Mo / ~350 Mo</a:t>
+                      </a:r>
+                    </a:p>
+                  </a:txBody>
+                  <a:tcPr marL="88900" marR="88900" marT="38100" marB="38100" anchor="ctr">
+                    <a:solidFill>
+                      <a:srgbClr val="F1F3F6"/>
                     </a:solidFill>
                   </a:tcPr>
                 </a:tc>
@@ -9041,6 +9188,39 @@
           </a:graphicData>
         </a:graphic>
       </p:graphicFrame>
+      <p:sp>
+        <p:nvSpPr>
+          <p:cNvPr id="6" name="TextBox 5"/>
+          <p:cNvSpPr txBox="1"/>
+          <p:nvPr/>
+        </p:nvSpPr>
+        <p:spPr>
+          <a:xfrm>
+            <a:off x="640080" y="6355080"/>
+            <a:ext cx="10911535" cy="411480"/>
+          </a:xfrm>
+          <a:prstGeom prst="rect">
+            <a:avLst/>
+          </a:prstGeom>
+          <a:noFill/>
+        </p:spPr>
+        <p:txBody>
+          <a:bodyPr wrap="none">
+            <a:spAutoFit/>
+          </a:bodyPr>
+          <a:lstStyle/>
+          <a:p>
+            <a:r>
+              <a:rPr sz="1000" i="1">
+                <a:solidFill>
+                  <a:srgbClr val="6B7280"/>
+                </a:solidFill>
+              </a:rPr>
+              <a:t>Chargé en 740 ms pour 100 000 nœuds. Fichiers : Services/DirectedGraph.cs (CSR + BFS) · Services/InMemoryGraphService.cs.</a:t>
+            </a:r>
+          </a:p>
+        </p:txBody>
+      </p:sp>
     </p:spTree>
   </p:cSld>
   <p:clrMapOvr>
@@ -9420,6 +9600,390 @@
           </a:p>
         </p:txBody>
       </p:sp>
+    </p:spTree>
+  </p:cSld>
+  <p:clrMapOvr>
+    <a:masterClrMapping/>
+  </p:clrMapOvr>
+</p:sld>
+</file>
+
+<file path=ppt/slides/slide20.xml><?xml version="1.0" encoding="utf-8"?>
+<p:sld xmlns:a="http://schemas.openxmlformats.org/drawingml/2006/main" xmlns:p="http://schemas.openxmlformats.org/presentationml/2006/main" xmlns:r="http://schemas.openxmlformats.org/officeDocument/2006/relationships">
+  <p:cSld>
+    <p:spTree>
+      <p:nvGrpSpPr>
+        <p:cNvPr id="1" name=""/>
+        <p:cNvGrpSpPr/>
+        <p:nvPr/>
+      </p:nvGrpSpPr>
+      <p:grpSpPr/>
+      <p:sp>
+        <p:nvSpPr>
+          <p:cNvPr id="2" name="Rectangle 1"/>
+          <p:cNvSpPr/>
+          <p:nvPr/>
+        </p:nvSpPr>
+        <p:spPr>
+          <a:xfrm>
+            <a:off x="0" y="0"/>
+            <a:ext cx="12191695" cy="146304"/>
+          </a:xfrm>
+          <a:prstGeom prst="rect">
+            <a:avLst/>
+          </a:prstGeom>
+          <a:solidFill>
+            <a:srgbClr val="1F3A5F"/>
+          </a:solidFill>
+          <a:ln>
+            <a:noFill/>
+          </a:ln>
+        </p:spPr>
+        <p:style>
+          <a:lnRef idx="1">
+            <a:schemeClr val="accent1"/>
+          </a:lnRef>
+          <a:fillRef idx="3">
+            <a:schemeClr val="accent1"/>
+          </a:fillRef>
+          <a:effectRef idx="2">
+            <a:schemeClr val="accent1"/>
+          </a:effectRef>
+          <a:fontRef idx="minor">
+            <a:schemeClr val="lt1"/>
+          </a:fontRef>
+        </p:style>
+        <p:txBody>
+          <a:bodyPr rtlCol="0" anchor="ctr"/>
+          <a:lstStyle/>
+          <a:p>
+            <a:pPr algn="ctr"/>
+          </a:p>
+        </p:txBody>
+      </p:sp>
+      <p:sp>
+        <p:nvSpPr>
+          <p:cNvPr id="3" name="TextBox 2"/>
+          <p:cNvSpPr txBox="1"/>
+          <p:nvPr/>
+        </p:nvSpPr>
+        <p:spPr>
+          <a:xfrm>
+            <a:off x="548640" y="310896"/>
+            <a:ext cx="11094415" cy="1005840"/>
+          </a:xfrm>
+          <a:prstGeom prst="rect">
+            <a:avLst/>
+          </a:prstGeom>
+          <a:noFill/>
+        </p:spPr>
+        <p:txBody>
+          <a:bodyPr wrap="square">
+            <a:spAutoFit/>
+          </a:bodyPr>
+          <a:lstStyle/>
+          <a:p>
+            <a:r>
+              <a:rPr sz="2800" b="1">
+                <a:solidFill>
+                  <a:srgbClr val="1F3A5F"/>
+                </a:solidFill>
+              </a:rPr>
+              <a:t>Synthèse</a:t>
+            </a:r>
+          </a:p>
+        </p:txBody>
+      </p:sp>
+      <p:graphicFrame>
+        <p:nvGraphicFramePr>
+          <p:cNvPr id="4" name="Table 3"/>
+          <p:cNvGraphicFramePr>
+            <a:graphicFrameLocks noGrp="1"/>
+          </p:cNvGraphicFramePr>
+          <p:nvPr/>
+        </p:nvGraphicFramePr>
+        <p:xfrm>
+          <a:off x="640080" y="1737360"/>
+          <a:ext cx="10911534" cy="2304288"/>
+        </p:xfrm>
+        <a:graphic>
+          <a:graphicData uri="http://schemas.openxmlformats.org/drawingml/2006/table">
+            <a:tbl>
+              <a:tblPr firstRow="1" bandRow="1">
+                <a:tableStyleId>{5C22544A-7EE6-4342-B048-85BDC9FD1C3A}</a:tableStyleId>
+              </a:tblPr>
+              <a:tblGrid>
+                <a:gridCol w="2909742"/>
+                <a:gridCol w="8001792"/>
+              </a:tblGrid>
+              <a:tr h="384048">
+                <a:tc>
+                  <a:txBody>
+                    <a:bodyPr/>
+                    <a:lstStyle/>
+                    <a:p>
+                      <a:r>
+                        <a:rPr sz="1150" b="1">
+                          <a:solidFill>
+                            <a:srgbClr val="FFFFFF"/>
+                          </a:solidFill>
+                        </a:rPr>
+                        <a:t>Aspect</a:t>
+                      </a:r>
+                    </a:p>
+                  </a:txBody>
+                  <a:tcPr marL="88900" marR="88900" marT="38100" marB="38100" anchor="ctr">
+                    <a:solidFill>
+                      <a:srgbClr val="1F3A5F"/>
+                    </a:solidFill>
+                  </a:tcPr>
+                </a:tc>
+                <a:tc>
+                  <a:txBody>
+                    <a:bodyPr/>
+                    <a:lstStyle/>
+                    <a:p>
+                      <a:r>
+                        <a:rPr sz="1150" b="1">
+                          <a:solidFill>
+                            <a:srgbClr val="FFFFFF"/>
+                          </a:solidFill>
+                        </a:rPr>
+                        <a:t>En bref</a:t>
+                      </a:r>
+                    </a:p>
+                  </a:txBody>
+                  <a:tcPr marL="88900" marR="88900" marT="38100" marB="38100" anchor="ctr">
+                    <a:solidFill>
+                      <a:srgbClr val="1F3A5F"/>
+                    </a:solidFill>
+                  </a:tcPr>
+                </a:tc>
+              </a:tr>
+              <a:tr h="384048">
+                <a:tc>
+                  <a:txBody>
+                    <a:bodyPr/>
+                    <a:lstStyle/>
+                    <a:p>
+                      <a:r>
+                        <a:rPr sz="1150">
+                          <a:solidFill>
+                            <a:srgbClr val="222A35"/>
+                          </a:solidFill>
+                        </a:rPr>
+                        <a:t>Le graphe</a:t>
+                      </a:r>
+                    </a:p>
+                  </a:txBody>
+                  <a:tcPr marL="88900" marR="88900" marT="38100" marB="38100" anchor="ctr">
+                    <a:solidFill>
+                      <a:srgbClr val="FFFFFF"/>
+                    </a:solidFill>
+                  </a:tcPr>
+                </a:tc>
+                <a:tc>
+                  <a:txBody>
+                    <a:bodyPr/>
+                    <a:lstStyle/>
+                    <a:p>
+                      <a:r>
+                        <a:rPr sz="1150">
+                          <a:solidFill>
+                            <a:srgbClr val="222A35"/>
+                          </a:solidFill>
+                        </a:rPr>
+                        <a:t>orienté, non pondéré, creux, cyclique possible, non connexe, ~100 000 nœuds</a:t>
+                      </a:r>
+                    </a:p>
+                  </a:txBody>
+                  <a:tcPr marL="88900" marR="88900" marT="38100" marB="38100" anchor="ctr">
+                    <a:solidFill>
+                      <a:srgbClr val="FFFFFF"/>
+                    </a:solidFill>
+                  </a:tcPr>
+                </a:tc>
+              </a:tr>
+              <a:tr h="384048">
+                <a:tc>
+                  <a:txBody>
+                    <a:bodyPr/>
+                    <a:lstStyle/>
+                    <a:p>
+                      <a:r>
+                        <a:rPr sz="1150">
+                          <a:solidFill>
+                            <a:srgbClr val="222A35"/>
+                          </a:solidFill>
+                        </a:rPr>
+                        <a:t>Le besoin</a:t>
+                      </a:r>
+                    </a:p>
+                  </a:txBody>
+                  <a:tcPr marL="88900" marR="88900" marT="38100" marB="38100" anchor="ctr">
+                    <a:solidFill>
+                      <a:srgbClr val="F1F3F6"/>
+                    </a:solidFill>
+                  </a:tcPr>
+                </a:tc>
+                <a:tc>
+                  <a:txBody>
+                    <a:bodyPr/>
+                    <a:lstStyle/>
+                    <a:p>
+                      <a:r>
+                        <a:rPr sz="1150">
+                          <a:solidFill>
+                            <a:srgbClr val="222A35"/>
+                          </a:solidFill>
+                        </a:rPr>
+                        <a:t>existence + plus court chemin — résolus ensemble par un seul BFS</a:t>
+                      </a:r>
+                    </a:p>
+                  </a:txBody>
+                  <a:tcPr marL="88900" marR="88900" marT="38100" marB="38100" anchor="ctr">
+                    <a:solidFill>
+                      <a:srgbClr val="F1F3F6"/>
+                    </a:solidFill>
+                  </a:tcPr>
+                </a:tc>
+              </a:tr>
+              <a:tr h="384048">
+                <a:tc>
+                  <a:txBody>
+                    <a:bodyPr/>
+                    <a:lstStyle/>
+                    <a:p>
+                      <a:r>
+                        <a:rPr sz="1150">
+                          <a:solidFill>
+                            <a:srgbClr val="222A35"/>
+                          </a:solidFill>
+                        </a:rPr>
+                        <a:t>L'algorithme</a:t>
+                      </a:r>
+                    </a:p>
+                  </a:txBody>
+                  <a:tcPr marL="88900" marR="88900" marT="38100" marB="38100" anchor="ctr">
+                    <a:solidFill>
+                      <a:srgbClr val="FFFFFF"/>
+                    </a:solidFill>
+                  </a:tcPr>
+                </a:tc>
+                <a:tc>
+                  <a:txBody>
+                    <a:bodyPr/>
+                    <a:lstStyle/>
+                    <a:p>
+                      <a:r>
+                        <a:rPr sz="1150">
+                          <a:solidFill>
+                            <a:srgbClr val="222A35"/>
+                          </a:solidFill>
+                        </a:rPr>
+                        <a:t>BFS bidirectionnel, borné, résultat en cache 5 min</a:t>
+                      </a:r>
+                    </a:p>
+                  </a:txBody>
+                  <a:tcPr marL="88900" marR="88900" marT="38100" marB="38100" anchor="ctr">
+                    <a:solidFill>
+                      <a:srgbClr val="FFFFFF"/>
+                    </a:solidFill>
+                  </a:tcPr>
+                </a:tc>
+              </a:tr>
+              <a:tr h="384048">
+                <a:tc>
+                  <a:txBody>
+                    <a:bodyPr/>
+                    <a:lstStyle/>
+                    <a:p>
+                      <a:r>
+                        <a:rPr sz="1150">
+                          <a:solidFill>
+                            <a:srgbClr val="222A35"/>
+                          </a:solidFill>
+                        </a:rPr>
+                        <a:t>Pas Dijkstra / A* / Floyd-Warshall</a:t>
+                      </a:r>
+                    </a:p>
+                  </a:txBody>
+                  <a:tcPr marL="88900" marR="88900" marT="38100" marB="38100" anchor="ctr">
+                    <a:solidFill>
+                      <a:srgbClr val="F1F3F6"/>
+                    </a:solidFill>
+                  </a:tcPr>
+                </a:tc>
+                <a:tc>
+                  <a:txBody>
+                    <a:bodyPr/>
+                    <a:lstStyle/>
+                    <a:p>
+                      <a:r>
+                        <a:rPr sz="1150">
+                          <a:solidFill>
+                            <a:srgbClr val="222A35"/>
+                          </a:solidFill>
+                        </a:rPr>
+                        <a:t>problème plus dur (poids, toutes paires), coût supérieur, sans bénéfice ici</a:t>
+                      </a:r>
+                    </a:p>
+                  </a:txBody>
+                  <a:tcPr marL="88900" marR="88900" marT="38100" marB="38100" anchor="ctr">
+                    <a:solidFill>
+                      <a:srgbClr val="F1F3F6"/>
+                    </a:solidFill>
+                  </a:tcPr>
+                </a:tc>
+              </a:tr>
+              <a:tr h="384048">
+                <a:tc>
+                  <a:txBody>
+                    <a:bodyPr/>
+                    <a:lstStyle/>
+                    <a:p>
+                      <a:r>
+                        <a:rPr sz="1150">
+                          <a:solidFill>
+                            <a:srgbClr val="222A35"/>
+                          </a:solidFill>
+                        </a:rPr>
+                        <a:t>dotnet-new-scan/ (ch. 11)</a:t>
+                      </a:r>
+                    </a:p>
+                  </a:txBody>
+                  <a:tcPr marL="88900" marR="88900" marT="38100" marB="38100" anchor="ctr">
+                    <a:solidFill>
+                      <a:srgbClr val="FFFFFF"/>
+                    </a:solidFill>
+                  </a:tcPr>
+                </a:tc>
+                <a:tc>
+                  <a:txBody>
+                    <a:bodyPr/>
+                    <a:lstStyle/>
+                    <a:p>
+                      <a:r>
+                        <a:rPr sz="1150">
+                          <a:solidFill>
+                            <a:srgbClr val="222A35"/>
+                          </a:solidFill>
+                        </a:rPr>
+                        <a:t>§ 11.4 composantes faibles · § 11.5 condensation SCC (OUI/NON exact) · § 11.7 graphe en mémoire (BFS sans SQL)</a:t>
+                      </a:r>
+                    </a:p>
+                  </a:txBody>
+                  <a:tcPr marL="88900" marR="88900" marT="38100" marB="38100" anchor="ctr">
+                    <a:solidFill>
+                      <a:srgbClr val="FFFFFF"/>
+                    </a:solidFill>
+                  </a:tcPr>
+                </a:tc>
+              </a:tr>
+            </a:tbl>
+          </a:graphicData>
+        </a:graphic>
+      </p:graphicFrame>
     </p:spTree>
   </p:cSld>
   <p:clrMapOvr>
